--- a/assets/powerpoints/B1-oksana-appelle-madame-rioux.pptx
+++ b/assets/powerpoints/B1-oksana-appelle-madame-rioux.pptx
@@ -1147,7 +1147,7 @@
           <a:lstStyle/>
           <a:p>
             <a:r>
-              <a:t>Faire écouter l'audio du module (Tâche 1) sans afficher le texte. Poser les quatre questions AVANT l'écoute et y revenir après.</a:t>
+              <a:t>Faire écouter l'audio du module (Défi 1) sans afficher le texte. Poser les quatre questions AVANT l'écoute et y revenir après.</a:t>
             </a:r>
           </a:p>
         </p:txBody>
